--- a/docs/snake-game-apresentacao.pptx
+++ b/docs/snake-game-apresentacao.pptx
@@ -139,8 +139,8 @@
 <pc:chgInfo xmlns:a="http://schemas.openxmlformats.org/drawingml/2006/main" xmlns:r="http://schemas.openxmlformats.org/officeDocument/2006/relationships" xmlns:ac="http://schemas.microsoft.com/office/drawing/2013/main/command" xmlns:pc="http://schemas.microsoft.com/office/powerpoint/2013/main/command">
   <pc:docChgLst>
     <pc:chgData name="Matheus Henrique de Andrade Pires." userId="4f7e66476b82237b" providerId="LiveId" clId="{4359D718-6623-4306-904E-8960D7912D9F}"/>
-    <pc:docChg chg="custSel delSld modSld">
-      <pc:chgData name="Matheus Henrique de Andrade Pires." userId="4f7e66476b82237b" providerId="LiveId" clId="{4359D718-6623-4306-904E-8960D7912D9F}" dt="2026-10-29T01:59:33.022" v="17" actId="14100"/>
+    <pc:docChg chg="undo custSel delSld modSld">
+      <pc:chgData name="Matheus Henrique de Andrade Pires." userId="4f7e66476b82237b" providerId="LiveId" clId="{4359D718-6623-4306-904E-8960D7912D9F}" dt="2026-10-29T02:14:42.694" v="50" actId="115"/>
       <pc:docMkLst>
         <pc:docMk/>
       </pc:docMkLst>
@@ -167,12 +167,100 @@
           </ac:picMkLst>
         </pc:picChg>
       </pc:sldChg>
-      <pc:sldChg chg="delSp mod">
-        <pc:chgData name="Matheus Henrique de Andrade Pires." userId="4f7e66476b82237b" providerId="LiveId" clId="{4359D718-6623-4306-904E-8960D7912D9F}" dt="2026-10-29T01:57:57.239" v="3" actId="478"/>
+      <pc:sldChg chg="addSp delSp modSp mod">
+        <pc:chgData name="Matheus Henrique de Andrade Pires." userId="4f7e66476b82237b" providerId="LiveId" clId="{4359D718-6623-4306-904E-8960D7912D9F}" dt="2026-10-29T02:14:42.694" v="50" actId="115"/>
         <pc:sldMkLst>
           <pc:docMk/>
           <pc:sldMk cId="0" sldId="257"/>
         </pc:sldMkLst>
+        <pc:spChg chg="ord">
+          <ac:chgData name="Matheus Henrique de Andrade Pires." userId="4f7e66476b82237b" providerId="LiveId" clId="{4359D718-6623-4306-904E-8960D7912D9F}" dt="2026-10-29T02:12:18.572" v="29" actId="167"/>
+          <ac:spMkLst>
+            <pc:docMk/>
+            <pc:sldMk cId="0" sldId="257"/>
+            <ac:spMk id="6" creationId="{00000000-0000-0000-0000-000000000000}"/>
+          </ac:spMkLst>
+        </pc:spChg>
+        <pc:spChg chg="ord">
+          <ac:chgData name="Matheus Henrique de Andrade Pires." userId="4f7e66476b82237b" providerId="LiveId" clId="{4359D718-6623-4306-904E-8960D7912D9F}" dt="2026-10-29T02:12:01.239" v="24" actId="167"/>
+          <ac:spMkLst>
+            <pc:docMk/>
+            <pc:sldMk cId="0" sldId="257"/>
+            <ac:spMk id="22" creationId="{00000000-0000-0000-0000-000000000000}"/>
+          </ac:spMkLst>
+        </pc:spChg>
+        <pc:spChg chg="ord">
+          <ac:chgData name="Matheus Henrique de Andrade Pires." userId="4f7e66476b82237b" providerId="LiveId" clId="{4359D718-6623-4306-904E-8960D7912D9F}" dt="2026-10-29T02:12:15.261" v="27" actId="167"/>
+          <ac:spMkLst>
+            <pc:docMk/>
+            <pc:sldMk cId="0" sldId="257"/>
+            <ac:spMk id="23" creationId="{00000000-0000-0000-0000-000000000000}"/>
+          </ac:spMkLst>
+        </pc:spChg>
+        <pc:spChg chg="mod ord">
+          <ac:chgData name="Matheus Henrique de Andrade Pires." userId="4f7e66476b82237b" providerId="LiveId" clId="{4359D718-6623-4306-904E-8960D7912D9F}" dt="2026-10-29T02:14:19.125" v="47" actId="1076"/>
+          <ac:spMkLst>
+            <pc:docMk/>
+            <pc:sldMk cId="0" sldId="257"/>
+            <ac:spMk id="46" creationId="{00000000-0000-0000-0000-000000000000}"/>
+          </ac:spMkLst>
+        </pc:spChg>
+        <pc:spChg chg="mod ord">
+          <ac:chgData name="Matheus Henrique de Andrade Pires." userId="4f7e66476b82237b" providerId="LiveId" clId="{4359D718-6623-4306-904E-8960D7912D9F}" dt="2026-10-29T02:14:34.042" v="49" actId="1076"/>
+          <ac:spMkLst>
+            <pc:docMk/>
+            <pc:sldMk cId="0" sldId="257"/>
+            <ac:spMk id="47" creationId="{00000000-0000-0000-0000-000000000000}"/>
+          </ac:spMkLst>
+        </pc:spChg>
+        <pc:spChg chg="mod">
+          <ac:chgData name="Matheus Henrique de Andrade Pires." userId="4f7e66476b82237b" providerId="LiveId" clId="{4359D718-6623-4306-904E-8960D7912D9F}" dt="2026-10-29T02:14:42.694" v="50" actId="115"/>
+          <ac:spMkLst>
+            <pc:docMk/>
+            <pc:sldMk cId="0" sldId="257"/>
+            <ac:spMk id="48" creationId="{00000000-0000-0000-0000-000000000000}"/>
+          </ac:spMkLst>
+        </pc:spChg>
+        <pc:spChg chg="mod">
+          <ac:chgData name="Matheus Henrique de Andrade Pires." userId="4f7e66476b82237b" providerId="LiveId" clId="{4359D718-6623-4306-904E-8960D7912D9F}" dt="2026-10-29T02:13:13.659" v="39" actId="1076"/>
+          <ac:spMkLst>
+            <pc:docMk/>
+            <pc:sldMk cId="0" sldId="257"/>
+            <ac:spMk id="49" creationId="{00000000-0000-0000-0000-000000000000}"/>
+          </ac:spMkLst>
+        </pc:spChg>
+        <pc:picChg chg="add del">
+          <ac:chgData name="Matheus Henrique de Andrade Pires." userId="4f7e66476b82237b" providerId="LiveId" clId="{4359D718-6623-4306-904E-8960D7912D9F}" dt="2026-10-29T02:11:59.494" v="23" actId="478"/>
+          <ac:picMkLst>
+            <pc:docMk/>
+            <pc:sldMk cId="0" sldId="257"/>
+            <ac:picMk id="27" creationId="{00000000-0000-0000-0000-000000000000}"/>
+          </ac:picMkLst>
+        </pc:picChg>
+        <pc:picChg chg="del">
+          <ac:chgData name="Matheus Henrique de Andrade Pires." userId="4f7e66476b82237b" providerId="LiveId" clId="{4359D718-6623-4306-904E-8960D7912D9F}" dt="2026-10-29T02:12:16.387" v="28" actId="478"/>
+          <ac:picMkLst>
+            <pc:docMk/>
+            <pc:sldMk cId="0" sldId="257"/>
+            <ac:picMk id="28" creationId="{00000000-0000-0000-0000-000000000000}"/>
+          </ac:picMkLst>
+        </pc:picChg>
+        <pc:picChg chg="del">
+          <ac:chgData name="Matheus Henrique de Andrade Pires." userId="4f7e66476b82237b" providerId="LiveId" clId="{4359D718-6623-4306-904E-8960D7912D9F}" dt="2026-10-29T02:12:26.409" v="31" actId="478"/>
+          <ac:picMkLst>
+            <pc:docMk/>
+            <pc:sldMk cId="0" sldId="257"/>
+            <ac:picMk id="29" creationId="{00000000-0000-0000-0000-000000000000}"/>
+          </ac:picMkLst>
+        </pc:picChg>
+        <pc:picChg chg="del">
+          <ac:chgData name="Matheus Henrique de Andrade Pires." userId="4f7e66476b82237b" providerId="LiveId" clId="{4359D718-6623-4306-904E-8960D7912D9F}" dt="2026-10-29T02:12:47.207" v="35" actId="478"/>
+          <ac:picMkLst>
+            <pc:docMk/>
+            <pc:sldMk cId="0" sldId="257"/>
+            <ac:picMk id="30" creationId="{00000000-0000-0000-0000-000000000000}"/>
+          </ac:picMkLst>
+        </pc:picChg>
         <pc:picChg chg="del">
           <ac:chgData name="Matheus Henrique de Andrade Pires." userId="4f7e66476b82237b" providerId="LiveId" clId="{4359D718-6623-4306-904E-8960D7912D9F}" dt="2026-10-29T01:57:57.239" v="3" actId="478"/>
           <ac:picMkLst>
@@ -4654,6 +4742,229 @@
       </p:grpSpPr>
       <p:sp>
         <p:nvSpPr>
+          <p:cNvPr id="6" name="Rounded Rectangle 5"/>
+          <p:cNvSpPr/>
+          <p:nvPr/>
+        </p:nvSpPr>
+        <p:spPr>
+          <a:xfrm>
+            <a:off x="609600" y="2721917"/>
+            <a:ext cx="4476750" cy="3212157"/>
+          </a:xfrm>
+          <a:prstGeom prst="roundRect">
+            <a:avLst>
+              <a:gd name="adj" fmla="val 4744"/>
+            </a:avLst>
+          </a:prstGeom>
+          <a:solidFill>
+            <a:srgbClr val="FFFFFF"/>
+          </a:solidFill>
+          <a:ln w="9525">
+            <a:solidFill>
+              <a:srgbClr val="E2E8F0"/>
+            </a:solidFill>
+          </a:ln>
+          <a:effectLst/>
+        </p:spPr>
+        <p:style>
+          <a:lnRef idx="1">
+            <a:schemeClr val="accent1"/>
+          </a:lnRef>
+          <a:fillRef idx="3">
+            <a:schemeClr val="accent1"/>
+          </a:fillRef>
+          <a:effectRef idx="2">
+            <a:schemeClr val="accent1"/>
+          </a:effectRef>
+          <a:fontRef idx="minor">
+            <a:schemeClr val="lt1"/>
+          </a:fontRef>
+        </p:style>
+        <p:txBody>
+          <a:bodyPr rtlCol="0" anchor="ctr"/>
+          <a:lstStyle/>
+          <a:p>
+            <a:pPr algn="ctr"/>
+            <a:endParaRPr/>
+          </a:p>
+        </p:txBody>
+      </p:sp>
+      <p:sp>
+        <p:nvSpPr>
+          <p:cNvPr id="23" name="Rounded Rectangle 22"/>
+          <p:cNvSpPr/>
+          <p:nvPr/>
+        </p:nvSpPr>
+        <p:spPr>
+          <a:xfrm>
+            <a:off x="2895600" y="3217217"/>
+            <a:ext cx="1952625" cy="447675"/>
+          </a:xfrm>
+          <a:prstGeom prst="roundRect">
+            <a:avLst>
+              <a:gd name="adj" fmla="val 21276"/>
+            </a:avLst>
+          </a:prstGeom>
+          <a:solidFill>
+            <a:srgbClr val="F8FAFC"/>
+          </a:solidFill>
+          <a:ln w="9525">
+            <a:solidFill>
+              <a:srgbClr val="CBD5E1"/>
+            </a:solidFill>
+          </a:ln>
+          <a:effectLst/>
+        </p:spPr>
+        <p:style>
+          <a:lnRef idx="1">
+            <a:schemeClr val="accent1"/>
+          </a:lnRef>
+          <a:fillRef idx="3">
+            <a:schemeClr val="accent1"/>
+          </a:fillRef>
+          <a:effectRef idx="2">
+            <a:schemeClr val="accent1"/>
+          </a:effectRef>
+          <a:fontRef idx="minor">
+            <a:schemeClr val="lt1"/>
+          </a:fontRef>
+        </p:style>
+        <p:txBody>
+          <a:bodyPr rtlCol="0" anchor="ctr"/>
+          <a:lstStyle/>
+          <a:p>
+            <a:pPr algn="ctr"/>
+            <a:endParaRPr/>
+          </a:p>
+        </p:txBody>
+      </p:sp>
+      <p:sp>
+        <p:nvSpPr>
+          <p:cNvPr id="47" name="TextBox 46"/>
+          <p:cNvSpPr txBox="1"/>
+          <p:nvPr/>
+        </p:nvSpPr>
+        <p:spPr>
+          <a:xfrm>
+            <a:off x="3505408" y="3342235"/>
+            <a:ext cx="726489" cy="189003"/>
+          </a:xfrm>
+          <a:prstGeom prst="rect">
+            <a:avLst/>
+          </a:prstGeom>
+          <a:noFill/>
+        </p:spPr>
+        <p:txBody>
+          <a:bodyPr wrap="square" lIns="0" tIns="0" rIns="0" bIns="0" anchor="t">
+            <a:spAutoFit/>
+          </a:bodyPr>
+          <a:lstStyle/>
+          <a:p>
+            <a:pPr algn="ctr"/>
+            <a:r>
+              <a:rPr sz="1200" b="1" i="0" u="none" dirty="0" err="1">
+                <a:solidFill>
+                  <a:srgbClr val="0F172A"/>
+                </a:solidFill>
+                <a:latin typeface="Plus Jakarta Sans"/>
+              </a:rPr>
+              <a:t>Baixo</a:t>
+            </a:r>
+            <a:endParaRPr sz="1200" b="1" i="0" u="none" dirty="0">
+              <a:solidFill>
+                <a:srgbClr val="0F172A"/>
+              </a:solidFill>
+              <a:latin typeface="Plus Jakarta Sans"/>
+            </a:endParaRPr>
+          </a:p>
+        </p:txBody>
+      </p:sp>
+      <p:sp>
+        <p:nvSpPr>
+          <p:cNvPr id="22" name="Rounded Rectangle 21"/>
+          <p:cNvSpPr/>
+          <p:nvPr/>
+        </p:nvSpPr>
+        <p:spPr>
+          <a:xfrm>
+            <a:off x="847725" y="3217217"/>
+            <a:ext cx="1952625" cy="447675"/>
+          </a:xfrm>
+          <a:prstGeom prst="roundRect">
+            <a:avLst>
+              <a:gd name="adj" fmla="val 21276"/>
+            </a:avLst>
+          </a:prstGeom>
+          <a:solidFill>
+            <a:srgbClr val="F8FAFC"/>
+          </a:solidFill>
+          <a:ln w="9525">
+            <a:solidFill>
+              <a:srgbClr val="CBD5E1"/>
+            </a:solidFill>
+          </a:ln>
+          <a:effectLst/>
+        </p:spPr>
+        <p:style>
+          <a:lnRef idx="1">
+            <a:schemeClr val="accent1"/>
+          </a:lnRef>
+          <a:fillRef idx="3">
+            <a:schemeClr val="accent1"/>
+          </a:fillRef>
+          <a:effectRef idx="2">
+            <a:schemeClr val="accent1"/>
+          </a:effectRef>
+          <a:fontRef idx="minor">
+            <a:schemeClr val="lt1"/>
+          </a:fontRef>
+        </p:style>
+        <p:txBody>
+          <a:bodyPr rtlCol="0" anchor="ctr"/>
+          <a:lstStyle/>
+          <a:p>
+            <a:pPr algn="ctr"/>
+            <a:endParaRPr/>
+          </a:p>
+        </p:txBody>
+      </p:sp>
+      <p:sp>
+        <p:nvSpPr>
+          <p:cNvPr id="46" name="TextBox 45"/>
+          <p:cNvSpPr txBox="1"/>
+          <p:nvPr/>
+        </p:nvSpPr>
+        <p:spPr>
+          <a:xfrm>
+            <a:off x="1442830" y="3361589"/>
+            <a:ext cx="726489" cy="184666"/>
+          </a:xfrm>
+          <a:prstGeom prst="rect">
+            <a:avLst/>
+          </a:prstGeom>
+          <a:noFill/>
+        </p:spPr>
+        <p:txBody>
+          <a:bodyPr wrap="square" lIns="0" tIns="0" rIns="0" bIns="0" anchor="t">
+            <a:spAutoFit/>
+          </a:bodyPr>
+          <a:lstStyle/>
+          <a:p>
+            <a:pPr algn="ctr"/>
+            <a:r>
+              <a:rPr sz="1200" b="1" i="0" u="none" dirty="0">
+                <a:solidFill>
+                  <a:srgbClr val="0F172A"/>
+                </a:solidFill>
+                <a:latin typeface="Plus Jakarta Sans"/>
+              </a:rPr>
+              <a:t>Cima</a:t>
+            </a:r>
+          </a:p>
+        </p:txBody>
+      </p:sp>
+      <p:sp>
+        <p:nvSpPr>
           <p:cNvPr id="2" name="Rectangle 1"/>
           <p:cNvSpPr/>
           <p:nvPr/>
@@ -4838,55 +5149,6 @@
       </p:sp>
       <p:sp>
         <p:nvSpPr>
-          <p:cNvPr id="6" name="Rounded Rectangle 5"/>
-          <p:cNvSpPr/>
-          <p:nvPr/>
-        </p:nvSpPr>
-        <p:spPr>
-          <a:xfrm>
-            <a:off x="609600" y="2721917"/>
-            <a:ext cx="4476750" cy="3212157"/>
-          </a:xfrm>
-          <a:prstGeom prst="roundRect">
-            <a:avLst>
-              <a:gd name="adj" fmla="val 4744"/>
-            </a:avLst>
-          </a:prstGeom>
-          <a:solidFill>
-            <a:srgbClr val="FFFFFF"/>
-          </a:solidFill>
-          <a:ln w="9525">
-            <a:solidFill>
-              <a:srgbClr val="E2E8F0"/>
-            </a:solidFill>
-          </a:ln>
-          <a:effectLst/>
-        </p:spPr>
-        <p:style>
-          <a:lnRef idx="1">
-            <a:schemeClr val="accent1"/>
-          </a:lnRef>
-          <a:fillRef idx="3">
-            <a:schemeClr val="accent1"/>
-          </a:fillRef>
-          <a:effectRef idx="2">
-            <a:schemeClr val="accent1"/>
-          </a:effectRef>
-          <a:fontRef idx="minor">
-            <a:schemeClr val="lt1"/>
-          </a:fontRef>
-        </p:style>
-        <p:txBody>
-          <a:bodyPr rtlCol="0" anchor="ctr"/>
-          <a:lstStyle/>
-          <a:p>
-            <a:pPr algn="ctr"/>
-            <a:endParaRPr/>
-          </a:p>
-        </p:txBody>
-      </p:sp>
-      <p:sp>
-        <p:nvSpPr>
           <p:cNvPr id="7" name="Rounded Rectangle 6"/>
           <p:cNvSpPr/>
           <p:nvPr/>
@@ -5568,13 +5830,13 @@
       </p:sp>
       <p:sp>
         <p:nvSpPr>
-          <p:cNvPr id="22" name="Rounded Rectangle 21"/>
+          <p:cNvPr id="24" name="Rounded Rectangle 23"/>
           <p:cNvSpPr/>
           <p:nvPr/>
         </p:nvSpPr>
         <p:spPr>
           <a:xfrm>
-            <a:off x="847725" y="3217217"/>
+            <a:off x="847725" y="3760142"/>
             <a:ext cx="1952625" cy="447675"/>
           </a:xfrm>
           <a:prstGeom prst="roundRect">
@@ -5617,13 +5879,13 @@
       </p:sp>
       <p:sp>
         <p:nvSpPr>
-          <p:cNvPr id="23" name="Rounded Rectangle 22"/>
+          <p:cNvPr id="25" name="Rounded Rectangle 24"/>
           <p:cNvSpPr/>
           <p:nvPr/>
         </p:nvSpPr>
         <p:spPr>
           <a:xfrm>
-            <a:off x="2895600" y="3217217"/>
+            <a:off x="2895600" y="3760142"/>
             <a:ext cx="1952625" cy="447675"/>
           </a:xfrm>
           <a:prstGeom prst="roundRect">
@@ -5664,104 +5926,6 @@
           </a:p>
         </p:txBody>
       </p:sp>
-      <p:sp>
-        <p:nvSpPr>
-          <p:cNvPr id="24" name="Rounded Rectangle 23"/>
-          <p:cNvSpPr/>
-          <p:nvPr/>
-        </p:nvSpPr>
-        <p:spPr>
-          <a:xfrm>
-            <a:off x="847725" y="3760142"/>
-            <a:ext cx="1952625" cy="447675"/>
-          </a:xfrm>
-          <a:prstGeom prst="roundRect">
-            <a:avLst>
-              <a:gd name="adj" fmla="val 21276"/>
-            </a:avLst>
-          </a:prstGeom>
-          <a:solidFill>
-            <a:srgbClr val="F8FAFC"/>
-          </a:solidFill>
-          <a:ln w="9525">
-            <a:solidFill>
-              <a:srgbClr val="CBD5E1"/>
-            </a:solidFill>
-          </a:ln>
-          <a:effectLst/>
-        </p:spPr>
-        <p:style>
-          <a:lnRef idx="1">
-            <a:schemeClr val="accent1"/>
-          </a:lnRef>
-          <a:fillRef idx="3">
-            <a:schemeClr val="accent1"/>
-          </a:fillRef>
-          <a:effectRef idx="2">
-            <a:schemeClr val="accent1"/>
-          </a:effectRef>
-          <a:fontRef idx="minor">
-            <a:schemeClr val="lt1"/>
-          </a:fontRef>
-        </p:style>
-        <p:txBody>
-          <a:bodyPr rtlCol="0" anchor="ctr"/>
-          <a:lstStyle/>
-          <a:p>
-            <a:pPr algn="ctr"/>
-            <a:endParaRPr/>
-          </a:p>
-        </p:txBody>
-      </p:sp>
-      <p:sp>
-        <p:nvSpPr>
-          <p:cNvPr id="25" name="Rounded Rectangle 24"/>
-          <p:cNvSpPr/>
-          <p:nvPr/>
-        </p:nvSpPr>
-        <p:spPr>
-          <a:xfrm>
-            <a:off x="2895600" y="3760142"/>
-            <a:ext cx="1952625" cy="447675"/>
-          </a:xfrm>
-          <a:prstGeom prst="roundRect">
-            <a:avLst>
-              <a:gd name="adj" fmla="val 21276"/>
-            </a:avLst>
-          </a:prstGeom>
-          <a:solidFill>
-            <a:srgbClr val="F8FAFC"/>
-          </a:solidFill>
-          <a:ln w="9525">
-            <a:solidFill>
-              <a:srgbClr val="CBD5E1"/>
-            </a:solidFill>
-          </a:ln>
-          <a:effectLst/>
-        </p:spPr>
-        <p:style>
-          <a:lnRef idx="1">
-            <a:schemeClr val="accent1"/>
-          </a:lnRef>
-          <a:fillRef idx="3">
-            <a:schemeClr val="accent1"/>
-          </a:fillRef>
-          <a:effectRef idx="2">
-            <a:schemeClr val="accent1"/>
-          </a:effectRef>
-          <a:fontRef idx="minor">
-            <a:schemeClr val="lt1"/>
-          </a:fontRef>
-        </p:style>
-        <p:txBody>
-          <a:bodyPr rtlCol="0" anchor="ctr"/>
-          <a:lstStyle/>
-          <a:p>
-            <a:pPr algn="ctr"/>
-            <a:endParaRPr/>
-          </a:p>
-        </p:txBody>
-      </p:sp>
       <p:pic>
         <p:nvPicPr>
           <p:cNvPr id="26" name="Picture 25" descr="image.png"/>
@@ -5786,102 +5950,6 @@
           </a:prstGeom>
         </p:spPr>
       </p:pic>
-      <p:pic>
-        <p:nvPicPr>
-          <p:cNvPr id="27" name="Picture 26" descr="image.png"/>
-          <p:cNvPicPr>
-            <a:picLocks noChangeAspect="1"/>
-          </p:cNvPicPr>
-          <p:nvPr/>
-        </p:nvPicPr>
-        <p:blipFill>
-          <a:blip r:embed="rId3"/>
-          <a:stretch>
-            <a:fillRect/>
-          </a:stretch>
-        </p:blipFill>
-        <p:spPr>
-          <a:xfrm>
-            <a:off x="1562100" y="3369617"/>
-            <a:ext cx="114300" cy="152400"/>
-          </a:xfrm>
-          <a:prstGeom prst="rect">
-            <a:avLst/>
-          </a:prstGeom>
-        </p:spPr>
-      </p:pic>
-      <p:pic>
-        <p:nvPicPr>
-          <p:cNvPr id="28" name="Picture 27" descr="image.png"/>
-          <p:cNvPicPr>
-            <a:picLocks noChangeAspect="1"/>
-          </p:cNvPicPr>
-          <p:nvPr/>
-        </p:nvPicPr>
-        <p:blipFill>
-          <a:blip r:embed="rId4"/>
-          <a:stretch>
-            <a:fillRect/>
-          </a:stretch>
-        </p:blipFill>
-        <p:spPr>
-          <a:xfrm>
-            <a:off x="3595687" y="3369617"/>
-            <a:ext cx="114300" cy="152400"/>
-          </a:xfrm>
-          <a:prstGeom prst="rect">
-            <a:avLst/>
-          </a:prstGeom>
-        </p:spPr>
-      </p:pic>
-      <p:pic>
-        <p:nvPicPr>
-          <p:cNvPr id="29" name="Picture 28" descr="image.png"/>
-          <p:cNvPicPr>
-            <a:picLocks noChangeAspect="1"/>
-          </p:cNvPicPr>
-          <p:nvPr/>
-        </p:nvPicPr>
-        <p:blipFill>
-          <a:blip r:embed="rId5"/>
-          <a:stretch>
-            <a:fillRect/>
-          </a:stretch>
-        </p:blipFill>
-        <p:spPr>
-          <a:xfrm>
-            <a:off x="1390650" y="3912542"/>
-            <a:ext cx="133350" cy="152400"/>
-          </a:xfrm>
-          <a:prstGeom prst="rect">
-            <a:avLst/>
-          </a:prstGeom>
-        </p:spPr>
-      </p:pic>
-      <p:pic>
-        <p:nvPicPr>
-          <p:cNvPr id="30" name="Picture 29" descr="image.png"/>
-          <p:cNvPicPr>
-            <a:picLocks noChangeAspect="1"/>
-          </p:cNvPicPr>
-          <p:nvPr/>
-        </p:nvPicPr>
-        <p:blipFill>
-          <a:blip r:embed="rId6"/>
-          <a:stretch>
-            <a:fillRect/>
-          </a:stretch>
-        </p:blipFill>
-        <p:spPr>
-          <a:xfrm>
-            <a:off x="3543300" y="3912542"/>
-            <a:ext cx="133350" cy="152400"/>
-          </a:xfrm>
-          <a:prstGeom prst="rect">
-            <a:avLst/>
-          </a:prstGeom>
-        </p:spPr>
-      </p:pic>
       <p:sp>
         <p:nvSpPr>
           <p:cNvPr id="31" name="TextBox 30"/>
@@ -6417,14 +6485,14 @@
       </p:sp>
       <p:sp>
         <p:nvSpPr>
-          <p:cNvPr id="46" name="TextBox 45"/>
+          <p:cNvPr id="48" name="TextBox 47"/>
           <p:cNvSpPr txBox="1"/>
           <p:nvPr/>
         </p:nvSpPr>
         <p:spPr>
           <a:xfrm>
-            <a:off x="717946" y="3331517"/>
-            <a:ext cx="2212181" cy="219075"/>
+            <a:off x="1388298" y="3876629"/>
+            <a:ext cx="836950" cy="184665"/>
           </a:xfrm>
           <a:prstGeom prst="rect">
             <a:avLst/>
@@ -6439,27 +6507,33 @@
           <a:p>
             <a:pPr algn="ctr"/>
             <a:r>
-              <a:rPr sz="1200" b="1" i="0" u="none">
+              <a:rPr sz="1200" b="1" i="0" u="sng" dirty="0" err="1">
                 <a:solidFill>
                   <a:srgbClr val="0F172A"/>
                 </a:solidFill>
                 <a:latin typeface="Plus Jakarta Sans"/>
               </a:rPr>
-              <a:t>Cima</a:t>
-            </a:r>
-          </a:p>
-        </p:txBody>
-      </p:sp>
-      <p:sp>
-        <p:nvSpPr>
-          <p:cNvPr id="47" name="TextBox 46"/>
+              <a:t>Esquerda</a:t>
+            </a:r>
+            <a:endParaRPr sz="1200" b="1" i="0" u="sng" dirty="0">
+              <a:solidFill>
+                <a:srgbClr val="0F172A"/>
+              </a:solidFill>
+              <a:latin typeface="Plus Jakarta Sans"/>
+            </a:endParaRPr>
+          </a:p>
+        </p:txBody>
+      </p:sp>
+      <p:sp>
+        <p:nvSpPr>
+          <p:cNvPr id="49" name="TextBox 48"/>
           <p:cNvSpPr txBox="1"/>
           <p:nvPr/>
         </p:nvSpPr>
         <p:spPr>
           <a:xfrm>
-            <a:off x="2765821" y="3331517"/>
-            <a:ext cx="2212181" cy="219075"/>
+            <a:off x="2765821" y="3889497"/>
+            <a:ext cx="2212181" cy="184666"/>
           </a:xfrm>
           <a:prstGeom prst="rect">
             <a:avLst/>
@@ -6474,84 +6548,20 @@
           <a:p>
             <a:pPr algn="ctr"/>
             <a:r>
-              <a:rPr sz="1200" b="1" i="0" u="none">
+              <a:rPr sz="1200" b="1" i="0" u="none" dirty="0" err="1">
                 <a:solidFill>
                   <a:srgbClr val="0F172A"/>
                 </a:solidFill>
                 <a:latin typeface="Plus Jakarta Sans"/>
               </a:rPr>
-              <a:t>Baixo</a:t>
-            </a:r>
-          </a:p>
-        </p:txBody>
-      </p:sp>
-      <p:sp>
-        <p:nvSpPr>
-          <p:cNvPr id="48" name="TextBox 47"/>
-          <p:cNvSpPr txBox="1"/>
-          <p:nvPr/>
-        </p:nvSpPr>
-        <p:spPr>
-          <a:xfrm>
-            <a:off x="717946" y="3874442"/>
-            <a:ext cx="2212181" cy="219075"/>
-          </a:xfrm>
-          <a:prstGeom prst="rect">
-            <a:avLst/>
-          </a:prstGeom>
-          <a:noFill/>
-        </p:spPr>
-        <p:txBody>
-          <a:bodyPr wrap="square" lIns="0" tIns="0" rIns="0" bIns="0" anchor="t">
-            <a:spAutoFit/>
-          </a:bodyPr>
-          <a:lstStyle/>
-          <a:p>
-            <a:pPr algn="ctr"/>
-            <a:r>
-              <a:rPr sz="1200" b="1" i="0" u="none">
-                <a:solidFill>
-                  <a:srgbClr val="0F172A"/>
-                </a:solidFill>
-                <a:latin typeface="Plus Jakarta Sans"/>
-              </a:rPr>
-              <a:t>Esquerda</a:t>
-            </a:r>
-          </a:p>
-        </p:txBody>
-      </p:sp>
-      <p:sp>
-        <p:nvSpPr>
-          <p:cNvPr id="49" name="TextBox 48"/>
-          <p:cNvSpPr txBox="1"/>
-          <p:nvPr/>
-        </p:nvSpPr>
-        <p:spPr>
-          <a:xfrm>
-            <a:off x="2765821" y="3874442"/>
-            <a:ext cx="2212181" cy="219075"/>
-          </a:xfrm>
-          <a:prstGeom prst="rect">
-            <a:avLst/>
-          </a:prstGeom>
-          <a:noFill/>
-        </p:spPr>
-        <p:txBody>
-          <a:bodyPr wrap="square" lIns="0" tIns="0" rIns="0" bIns="0" anchor="t">
-            <a:spAutoFit/>
-          </a:bodyPr>
-          <a:lstStyle/>
-          <a:p>
-            <a:pPr algn="ctr"/>
-            <a:r>
-              <a:rPr sz="1200" b="1" i="0" u="none">
-                <a:solidFill>
-                  <a:srgbClr val="0F172A"/>
-                </a:solidFill>
-                <a:latin typeface="Plus Jakarta Sans"/>
-              </a:rPr>
               <a:t>Direita</a:t>
             </a:r>
+            <a:endParaRPr sz="1200" b="1" i="0" u="none" dirty="0">
+              <a:solidFill>
+                <a:srgbClr val="0F172A"/>
+              </a:solidFill>
+              <a:latin typeface="Plus Jakarta Sans"/>
+            </a:endParaRPr>
           </a:p>
         </p:txBody>
       </p:sp>

--- a/docs/snake-game-apresentacao.pptx
+++ b/docs/snake-game-apresentacao.pptx
@@ -140,12 +140,12 @@
   <pc:docChgLst>
     <pc:chgData name="Matheus Henrique de Andrade Pires." userId="4f7e66476b82237b" providerId="LiveId" clId="{4359D718-6623-4306-904E-8960D7912D9F}"/>
     <pc:docChg chg="undo custSel delSld modSld">
-      <pc:chgData name="Matheus Henrique de Andrade Pires." userId="4f7e66476b82237b" providerId="LiveId" clId="{4359D718-6623-4306-904E-8960D7912D9F}" dt="2026-10-29T02:14:42.694" v="50" actId="115"/>
+      <pc:chgData name="Matheus Henrique de Andrade Pires." userId="4f7e66476b82237b" providerId="LiveId" clId="{4359D718-6623-4306-904E-8960D7912D9F}" dt="2026-10-29T02:16:10.198" v="53" actId="115"/>
       <pc:docMkLst>
         <pc:docMk/>
       </pc:docMkLst>
       <pc:sldChg chg="delSp modSp mod">
-        <pc:chgData name="Matheus Henrique de Andrade Pires." userId="4f7e66476b82237b" providerId="LiveId" clId="{4359D718-6623-4306-904E-8960D7912D9F}" dt="2026-10-29T01:58:18.289" v="6" actId="1076"/>
+        <pc:chgData name="Matheus Henrique de Andrade Pires." userId="4f7e66476b82237b" providerId="LiveId" clId="{4359D718-6623-4306-904E-8960D7912D9F}" dt="2026-10-29T02:16:10.198" v="53" actId="115"/>
         <pc:sldMkLst>
           <pc:docMk/>
           <pc:sldMk cId="0" sldId="256"/>
@@ -158,6 +158,14 @@
             <ac:spMk id="20" creationId="{00000000-0000-0000-0000-000000000000}"/>
           </ac:spMkLst>
         </pc:spChg>
+        <pc:spChg chg="mod">
+          <ac:chgData name="Matheus Henrique de Andrade Pires." userId="4f7e66476b82237b" providerId="LiveId" clId="{4359D718-6623-4306-904E-8960D7912D9F}" dt="2026-10-29T02:16:10.198" v="53" actId="115"/>
+          <ac:spMkLst>
+            <pc:docMk/>
+            <pc:sldMk cId="0" sldId="256"/>
+            <ac:spMk id="22" creationId="{00000000-0000-0000-0000-000000000000}"/>
+          </ac:spMkLst>
+        </pc:spChg>
         <pc:picChg chg="del">
           <ac:chgData name="Matheus Henrique de Andrade Pires." userId="4f7e66476b82237b" providerId="LiveId" clId="{4359D718-6623-4306-904E-8960D7912D9F}" dt="2026-10-29T01:57:39.131" v="0" actId="478"/>
           <ac:picMkLst>
@@ -168,13 +176,13 @@
         </pc:picChg>
       </pc:sldChg>
       <pc:sldChg chg="addSp delSp modSp mod">
-        <pc:chgData name="Matheus Henrique de Andrade Pires." userId="4f7e66476b82237b" providerId="LiveId" clId="{4359D718-6623-4306-904E-8960D7912D9F}" dt="2026-10-29T02:14:42.694" v="50" actId="115"/>
+        <pc:chgData name="Matheus Henrique de Andrade Pires." userId="4f7e66476b82237b" providerId="LiveId" clId="{4359D718-6623-4306-904E-8960D7912D9F}" dt="2026-10-29T02:15:45.114" v="52" actId="115"/>
         <pc:sldMkLst>
           <pc:docMk/>
           <pc:sldMk cId="0" sldId="257"/>
         </pc:sldMkLst>
-        <pc:spChg chg="ord">
-          <ac:chgData name="Matheus Henrique de Andrade Pires." userId="4f7e66476b82237b" providerId="LiveId" clId="{4359D718-6623-4306-904E-8960D7912D9F}" dt="2026-10-29T02:12:18.572" v="29" actId="167"/>
+        <pc:spChg chg="mod ord">
+          <ac:chgData name="Matheus Henrique de Andrade Pires." userId="4f7e66476b82237b" providerId="LiveId" clId="{4359D718-6623-4306-904E-8960D7912D9F}" dt="2026-10-29T02:15:45.114" v="52" actId="115"/>
           <ac:spMkLst>
             <pc:docMk/>
             <pc:sldMk cId="0" sldId="257"/>
@@ -214,7 +222,7 @@
           </ac:spMkLst>
         </pc:spChg>
         <pc:spChg chg="mod">
-          <ac:chgData name="Matheus Henrique de Andrade Pires." userId="4f7e66476b82237b" providerId="LiveId" clId="{4359D718-6623-4306-904E-8960D7912D9F}" dt="2026-10-29T02:14:42.694" v="50" actId="115"/>
+          <ac:chgData name="Matheus Henrique de Andrade Pires." userId="4f7e66476b82237b" providerId="LiveId" clId="{4359D718-6623-4306-904E-8960D7912D9F}" dt="2026-10-29T02:15:43.544" v="51" actId="115"/>
           <ac:spMkLst>
             <pc:docMk/>
             <pc:sldMk cId="0" sldId="257"/>
@@ -4130,7 +4138,7 @@
         <p:spPr>
           <a:xfrm>
             <a:off x="609600" y="685800"/>
-            <a:ext cx="8001000" cy="365670"/>
+            <a:ext cx="5313442" cy="360163"/>
           </a:xfrm>
           <a:prstGeom prst="rect">
             <a:avLst/>
@@ -4149,13 +4157,49 @@
               </a:lnSpc>
             </a:pPr>
             <a:r>
-              <a:rPr sz="2400" b="1" i="0" u="none">
+              <a:rPr sz="2400" b="1" i="0" u="sng" dirty="0">
                 <a:solidFill>
                   <a:srgbClr val="0F172A"/>
                 </a:solidFill>
                 <a:latin typeface="Space Grotesk"/>
               </a:rPr>
-              <a:t>1. O Ambiente e a Descrição do Estado (S)</a:t>
+              <a:t>1. O </a:t>
+            </a:r>
+            <a:r>
+              <a:rPr sz="2400" b="1" i="0" u="sng" dirty="0" err="1">
+                <a:solidFill>
+                  <a:srgbClr val="0F172A"/>
+                </a:solidFill>
+                <a:latin typeface="Space Grotesk"/>
+              </a:rPr>
+              <a:t>Ambiente</a:t>
+            </a:r>
+            <a:r>
+              <a:rPr sz="2400" b="1" i="0" u="sng" dirty="0">
+                <a:solidFill>
+                  <a:srgbClr val="0F172A"/>
+                </a:solidFill>
+                <a:latin typeface="Space Grotesk"/>
+              </a:rPr>
+              <a:t> e a </a:t>
+            </a:r>
+            <a:r>
+              <a:rPr sz="2400" b="1" i="0" u="sng" dirty="0" err="1">
+                <a:solidFill>
+                  <a:srgbClr val="0F172A"/>
+                </a:solidFill>
+                <a:latin typeface="Space Grotesk"/>
+              </a:rPr>
+              <a:t>Descrição</a:t>
+            </a:r>
+            <a:r>
+              <a:rPr sz="2400" b="1" i="0" u="sng" dirty="0">
+                <a:solidFill>
+                  <a:srgbClr val="0F172A"/>
+                </a:solidFill>
+                <a:latin typeface="Space Grotesk"/>
+              </a:rPr>
+              <a:t> do Estado (S)</a:t>
             </a:r>
           </a:p>
         </p:txBody>
@@ -4785,7 +4829,7 @@
           <a:lstStyle/>
           <a:p>
             <a:pPr algn="ctr"/>
-            <a:endParaRPr/>
+            <a:endParaRPr u="sng" dirty="0"/>
           </a:p>
         </p:txBody>
       </p:sp>
@@ -6507,7 +6551,7 @@
           <a:p>
             <a:pPr algn="ctr"/>
             <a:r>
-              <a:rPr sz="1200" b="1" i="0" u="sng" dirty="0" err="1">
+              <a:rPr sz="1200" b="1" i="0" dirty="0" err="1">
                 <a:solidFill>
                   <a:srgbClr val="0F172A"/>
                 </a:solidFill>
@@ -6515,7 +6559,7 @@
               </a:rPr>
               <a:t>Esquerda</a:t>
             </a:r>
-            <a:endParaRPr sz="1200" b="1" i="0" u="sng" dirty="0">
+            <a:endParaRPr sz="1200" b="1" i="0" dirty="0">
               <a:solidFill>
                 <a:srgbClr val="0F172A"/>
               </a:solidFill>

--- a/docs/snake-game-apresentacao.pptx
+++ b/docs/snake-game-apresentacao.pptx
@@ -135,21 +135,37 @@
 </p:presentation>
 </file>
 
+<file path=ppt/revisionInfo.xml><?xml version="1.0" encoding="utf-8"?>
+<p1510:revInfo xmlns:a="http://schemas.openxmlformats.org/drawingml/2006/main" xmlns:r="http://schemas.openxmlformats.org/officeDocument/2006/relationships" xmlns:p1510="http://schemas.microsoft.com/office/powerpoint/2015/10/main">
+  <p1510:revLst>
+    <p1510:client id="{CC69E834-DAD2-45A8-9EBF-D7E658F449FC}" v="11" dt="2026-10-29T02:25:13.110"/>
+  </p1510:revLst>
+</p1510:revInfo>
+</file>
+
 <file path=ppt/changesInfos/changesInfo1.xml><?xml version="1.0" encoding="utf-8"?>
 <pc:chgInfo xmlns:a="http://schemas.openxmlformats.org/drawingml/2006/main" xmlns:r="http://schemas.openxmlformats.org/officeDocument/2006/relationships" xmlns:ac="http://schemas.microsoft.com/office/drawing/2013/main/command" xmlns:pc="http://schemas.microsoft.com/office/powerpoint/2013/main/command">
   <pc:docChgLst>
     <pc:chgData name="Matheus Henrique de Andrade Pires." userId="4f7e66476b82237b" providerId="LiveId" clId="{4359D718-6623-4306-904E-8960D7912D9F}"/>
     <pc:docChg chg="undo custSel delSld modSld">
-      <pc:chgData name="Matheus Henrique de Andrade Pires." userId="4f7e66476b82237b" providerId="LiveId" clId="{4359D718-6623-4306-904E-8960D7912D9F}" dt="2026-10-29T02:16:10.198" v="53" actId="115"/>
+      <pc:chgData name="Matheus Henrique de Andrade Pires." userId="4f7e66476b82237b" providerId="LiveId" clId="{4359D718-6623-4306-904E-8960D7912D9F}" dt="2026-10-29T02:25:51.217" v="282" actId="20577"/>
       <pc:docMkLst>
         <pc:docMk/>
       </pc:docMkLst>
-      <pc:sldChg chg="delSp modSp mod">
-        <pc:chgData name="Matheus Henrique de Andrade Pires." userId="4f7e66476b82237b" providerId="LiveId" clId="{4359D718-6623-4306-904E-8960D7912D9F}" dt="2026-10-29T02:16:10.198" v="53" actId="115"/>
+      <pc:sldChg chg="addSp delSp modSp mod">
+        <pc:chgData name="Matheus Henrique de Andrade Pires." userId="4f7e66476b82237b" providerId="LiveId" clId="{4359D718-6623-4306-904E-8960D7912D9F}" dt="2026-10-29T02:25:51.217" v="282" actId="20577"/>
         <pc:sldMkLst>
           <pc:docMk/>
           <pc:sldMk cId="0" sldId="256"/>
         </pc:sldMkLst>
+        <pc:spChg chg="mod">
+          <ac:chgData name="Matheus Henrique de Andrade Pires." userId="4f7e66476b82237b" providerId="LiveId" clId="{4359D718-6623-4306-904E-8960D7912D9F}" dt="2026-10-29T02:22:09.850" v="87" actId="1076"/>
+          <ac:spMkLst>
+            <pc:docMk/>
+            <pc:sldMk cId="0" sldId="256"/>
+            <ac:spMk id="10" creationId="{00000000-0000-0000-0000-000000000000}"/>
+          </ac:spMkLst>
+        </pc:spChg>
         <pc:spChg chg="mod">
           <ac:chgData name="Matheus Henrique de Andrade Pires." userId="4f7e66476b82237b" providerId="LiveId" clId="{4359D718-6623-4306-904E-8960D7912D9F}" dt="2026-10-29T01:58:18.289" v="6" actId="1076"/>
           <ac:spMkLst>
@@ -159,19 +175,203 @@
           </ac:spMkLst>
         </pc:spChg>
         <pc:spChg chg="mod">
-          <ac:chgData name="Matheus Henrique de Andrade Pires." userId="4f7e66476b82237b" providerId="LiveId" clId="{4359D718-6623-4306-904E-8960D7912D9F}" dt="2026-10-29T02:16:10.198" v="53" actId="115"/>
+          <ac:chgData name="Matheus Henrique de Andrade Pires." userId="4f7e66476b82237b" providerId="LiveId" clId="{4359D718-6623-4306-904E-8960D7912D9F}" dt="2026-10-29T02:19:52.846" v="54" actId="115"/>
           <ac:spMkLst>
             <pc:docMk/>
             <pc:sldMk cId="0" sldId="256"/>
             <ac:spMk id="22" creationId="{00000000-0000-0000-0000-000000000000}"/>
           </ac:spMkLst>
         </pc:spChg>
+        <pc:spChg chg="mod">
+          <ac:chgData name="Matheus Henrique de Andrade Pires." userId="4f7e66476b82237b" providerId="LiveId" clId="{4359D718-6623-4306-904E-8960D7912D9F}" dt="2026-10-29T02:22:09.850" v="87" actId="1076"/>
+          <ac:spMkLst>
+            <pc:docMk/>
+            <pc:sldMk cId="0" sldId="256"/>
+            <ac:spMk id="36" creationId="{00000000-0000-0000-0000-000000000000}"/>
+          </ac:spMkLst>
+        </pc:spChg>
+        <pc:spChg chg="mod">
+          <ac:chgData name="Matheus Henrique de Andrade Pires." userId="4f7e66476b82237b" providerId="LiveId" clId="{4359D718-6623-4306-904E-8960D7912D9F}" dt="2026-10-29T02:22:09.850" v="87" actId="1076"/>
+          <ac:spMkLst>
+            <pc:docMk/>
+            <pc:sldMk cId="0" sldId="256"/>
+            <ac:spMk id="37" creationId="{00000000-0000-0000-0000-000000000000}"/>
+          </ac:spMkLst>
+        </pc:spChg>
+        <pc:spChg chg="add del mod">
+          <ac:chgData name="Matheus Henrique de Andrade Pires." userId="4f7e66476b82237b" providerId="LiveId" clId="{4359D718-6623-4306-904E-8960D7912D9F}" dt="2026-10-29T02:20:59.159" v="74" actId="767"/>
+          <ac:spMkLst>
+            <pc:docMk/>
+            <pc:sldMk cId="0" sldId="256"/>
+            <ac:spMk id="38" creationId="{C181590E-955F-4E1D-7891-968C8D30C3AD}"/>
+          </ac:spMkLst>
+        </pc:spChg>
+        <pc:spChg chg="add mod">
+          <ac:chgData name="Matheus Henrique de Andrade Pires." userId="4f7e66476b82237b" providerId="LiveId" clId="{4359D718-6623-4306-904E-8960D7912D9F}" dt="2026-10-29T02:20:51.444" v="72" actId="571"/>
+          <ac:spMkLst>
+            <pc:docMk/>
+            <pc:sldMk cId="0" sldId="256"/>
+            <ac:spMk id="39" creationId="{8ABD97EB-1BAF-50DF-C7E3-263907B4EABB}"/>
+          </ac:spMkLst>
+        </pc:spChg>
+        <pc:spChg chg="add mod">
+          <ac:chgData name="Matheus Henrique de Andrade Pires." userId="4f7e66476b82237b" providerId="LiveId" clId="{4359D718-6623-4306-904E-8960D7912D9F}" dt="2026-10-29T02:20:51.444" v="72" actId="571"/>
+          <ac:spMkLst>
+            <pc:docMk/>
+            <pc:sldMk cId="0" sldId="256"/>
+            <ac:spMk id="40" creationId="{3AF540A1-EEF3-A6E6-D179-E1DC1C51AA84}"/>
+          </ac:spMkLst>
+        </pc:spChg>
+        <pc:spChg chg="add mod">
+          <ac:chgData name="Matheus Henrique de Andrade Pires." userId="4f7e66476b82237b" providerId="LiveId" clId="{4359D718-6623-4306-904E-8960D7912D9F}" dt="2026-10-29T02:20:51.444" v="72" actId="571"/>
+          <ac:spMkLst>
+            <pc:docMk/>
+            <pc:sldMk cId="0" sldId="256"/>
+            <ac:spMk id="41" creationId="{429ED1D2-C17F-2565-AB0A-5A63B99EFDCA}"/>
+          </ac:spMkLst>
+        </pc:spChg>
+        <pc:spChg chg="add mod">
+          <ac:chgData name="Matheus Henrique de Andrade Pires." userId="4f7e66476b82237b" providerId="LiveId" clId="{4359D718-6623-4306-904E-8960D7912D9F}" dt="2026-10-29T02:20:51.444" v="72" actId="571"/>
+          <ac:spMkLst>
+            <pc:docMk/>
+            <pc:sldMk cId="0" sldId="256"/>
+            <ac:spMk id="42" creationId="{36AFE4F1-159D-A486-E76F-5987E1535191}"/>
+          </ac:spMkLst>
+        </pc:spChg>
+        <pc:spChg chg="add del mod">
+          <ac:chgData name="Matheus Henrique de Andrade Pires." userId="4f7e66476b82237b" providerId="LiveId" clId="{4359D718-6623-4306-904E-8960D7912D9F}" dt="2026-10-29T02:20:50.947" v="71" actId="22"/>
+          <ac:spMkLst>
+            <pc:docMk/>
+            <pc:sldMk cId="0" sldId="256"/>
+            <ac:spMk id="44" creationId="{FC0B052C-1A35-AA69-DA14-AA7EDB96DB6C}"/>
+          </ac:spMkLst>
+        </pc:spChg>
+        <pc:spChg chg="add del mod">
+          <ac:chgData name="Matheus Henrique de Andrade Pires." userId="4f7e66476b82237b" providerId="LiveId" clId="{4359D718-6623-4306-904E-8960D7912D9F}" dt="2026-10-29T02:20:50.947" v="71" actId="22"/>
+          <ac:spMkLst>
+            <pc:docMk/>
+            <pc:sldMk cId="0" sldId="256"/>
+            <ac:spMk id="46" creationId="{EA6C4178-1C1A-0A9F-701D-9D4A206CFC68}"/>
+          </ac:spMkLst>
+        </pc:spChg>
+        <pc:spChg chg="add del mod">
+          <ac:chgData name="Matheus Henrique de Andrade Pires." userId="4f7e66476b82237b" providerId="LiveId" clId="{4359D718-6623-4306-904E-8960D7912D9F}" dt="2026-10-29T02:20:50.947" v="71" actId="22"/>
+          <ac:spMkLst>
+            <pc:docMk/>
+            <pc:sldMk cId="0" sldId="256"/>
+            <ac:spMk id="48" creationId="{66F3640F-1713-40E7-3A79-FEC5E4EE9730}"/>
+          </ac:spMkLst>
+        </pc:spChg>
+        <pc:spChg chg="add del mod">
+          <ac:chgData name="Matheus Henrique de Andrade Pires." userId="4f7e66476b82237b" providerId="LiveId" clId="{4359D718-6623-4306-904E-8960D7912D9F}" dt="2026-10-29T02:20:50.947" v="71" actId="22"/>
+          <ac:spMkLst>
+            <pc:docMk/>
+            <pc:sldMk cId="0" sldId="256"/>
+            <ac:spMk id="50" creationId="{062C5BFB-6E5B-1E71-6450-413CE5E74044}"/>
+          </ac:spMkLst>
+        </pc:spChg>
+        <pc:spChg chg="add mod">
+          <ac:chgData name="Matheus Henrique de Andrade Pires." userId="4f7e66476b82237b" providerId="LiveId" clId="{4359D718-6623-4306-904E-8960D7912D9F}" dt="2026-10-29T02:21:08.169" v="77" actId="571"/>
+          <ac:spMkLst>
+            <pc:docMk/>
+            <pc:sldMk cId="0" sldId="256"/>
+            <ac:spMk id="53" creationId="{801F6986-6B6F-BD1F-7DA3-FC352ADEE1BD}"/>
+          </ac:spMkLst>
+        </pc:spChg>
+        <pc:spChg chg="add mod">
+          <ac:chgData name="Matheus Henrique de Andrade Pires." userId="4f7e66476b82237b" providerId="LiveId" clId="{4359D718-6623-4306-904E-8960D7912D9F}" dt="2026-10-29T02:21:08.169" v="77" actId="571"/>
+          <ac:spMkLst>
+            <pc:docMk/>
+            <pc:sldMk cId="0" sldId="256"/>
+            <ac:spMk id="54" creationId="{677B690E-236A-1445-F874-F4E4FF6E6DB1}"/>
+          </ac:spMkLst>
+        </pc:spChg>
+        <pc:spChg chg="add mod">
+          <ac:chgData name="Matheus Henrique de Andrade Pires." userId="4f7e66476b82237b" providerId="LiveId" clId="{4359D718-6623-4306-904E-8960D7912D9F}" dt="2026-10-29T02:21:27.805" v="81" actId="571"/>
+          <ac:spMkLst>
+            <pc:docMk/>
+            <pc:sldMk cId="0" sldId="256"/>
+            <ac:spMk id="55" creationId="{D1154525-1D4F-74FD-D15E-8F0B69BE8004}"/>
+          </ac:spMkLst>
+        </pc:spChg>
+        <pc:spChg chg="add mod">
+          <ac:chgData name="Matheus Henrique de Andrade Pires." userId="4f7e66476b82237b" providerId="LiveId" clId="{4359D718-6623-4306-904E-8960D7912D9F}" dt="2026-10-29T02:22:03.194" v="86" actId="1076"/>
+          <ac:spMkLst>
+            <pc:docMk/>
+            <pc:sldMk cId="0" sldId="256"/>
+            <ac:spMk id="56" creationId="{37DC613D-DE68-48C5-92CA-EFE769CD1841}"/>
+          </ac:spMkLst>
+        </pc:spChg>
+        <pc:spChg chg="add mod">
+          <ac:chgData name="Matheus Henrique de Andrade Pires." userId="4f7e66476b82237b" providerId="LiveId" clId="{4359D718-6623-4306-904E-8960D7912D9F}" dt="2026-10-29T02:24:58.346" v="92" actId="207"/>
+          <ac:spMkLst>
+            <pc:docMk/>
+            <pc:sldMk cId="0" sldId="256"/>
+            <ac:spMk id="57" creationId="{303C5C41-DC53-FFBC-A1F8-0B5F9F54D5F2}"/>
+          </ac:spMkLst>
+        </pc:spChg>
+        <pc:spChg chg="add mod">
+          <ac:chgData name="Matheus Henrique de Andrade Pires." userId="4f7e66476b82237b" providerId="LiveId" clId="{4359D718-6623-4306-904E-8960D7912D9F}" dt="2026-10-29T02:23:30.529" v="90" actId="207"/>
+          <ac:spMkLst>
+            <pc:docMk/>
+            <pc:sldMk cId="0" sldId="256"/>
+            <ac:spMk id="58" creationId="{29137423-E009-9A96-4712-9AF60903CFDA}"/>
+          </ac:spMkLst>
+        </pc:spChg>
+        <pc:spChg chg="add mod">
+          <ac:chgData name="Matheus Henrique de Andrade Pires." userId="4f7e66476b82237b" providerId="LiveId" clId="{4359D718-6623-4306-904E-8960D7912D9F}" dt="2026-10-29T02:25:29.417" v="130" actId="20577"/>
+          <ac:spMkLst>
+            <pc:docMk/>
+            <pc:sldMk cId="0" sldId="256"/>
+            <ac:spMk id="59" creationId="{67F1167C-7FF6-CF24-E73B-B39C4CB5B497}"/>
+          </ac:spMkLst>
+        </pc:spChg>
+        <pc:spChg chg="add mod">
+          <ac:chgData name="Matheus Henrique de Andrade Pires." userId="4f7e66476b82237b" providerId="LiveId" clId="{4359D718-6623-4306-904E-8960D7912D9F}" dt="2026-10-29T02:25:51.217" v="282" actId="20577"/>
+          <ac:spMkLst>
+            <pc:docMk/>
+            <pc:sldMk cId="0" sldId="256"/>
+            <ac:spMk id="60" creationId="{CC4AB9BA-6CAE-AD57-B1D8-7880A17F3264}"/>
+          </ac:spMkLst>
+        </pc:spChg>
+        <pc:picChg chg="mod">
+          <ac:chgData name="Matheus Henrique de Andrade Pires." userId="4f7e66476b82237b" providerId="LiveId" clId="{4359D718-6623-4306-904E-8960D7912D9F}" dt="2026-10-29T02:22:09.850" v="87" actId="1076"/>
+          <ac:picMkLst>
+            <pc:docMk/>
+            <pc:sldMk cId="0" sldId="256"/>
+            <ac:picMk id="16" creationId="{00000000-0000-0000-0000-000000000000}"/>
+          </ac:picMkLst>
+        </pc:picChg>
+        <pc:picChg chg="mod">
+          <ac:chgData name="Matheus Henrique de Andrade Pires." userId="4f7e66476b82237b" providerId="LiveId" clId="{4359D718-6623-4306-904E-8960D7912D9F}" dt="2026-10-29T02:22:09.850" v="87" actId="1076"/>
+          <ac:picMkLst>
+            <pc:docMk/>
+            <pc:sldMk cId="0" sldId="256"/>
+            <ac:picMk id="18" creationId="{00000000-0000-0000-0000-000000000000}"/>
+          </ac:picMkLst>
+        </pc:picChg>
         <pc:picChg chg="del">
           <ac:chgData name="Matheus Henrique de Andrade Pires." userId="4f7e66476b82237b" providerId="LiveId" clId="{4359D718-6623-4306-904E-8960D7912D9F}" dt="2026-10-29T01:57:39.131" v="0" actId="478"/>
           <ac:picMkLst>
             <pc:docMk/>
             <pc:sldMk cId="0" sldId="256"/>
             <ac:picMk id="38" creationId="{00000000-0000-0000-0000-000000000000}"/>
+          </ac:picMkLst>
+        </pc:picChg>
+        <pc:picChg chg="add mod">
+          <ac:chgData name="Matheus Henrique de Andrade Pires." userId="4f7e66476b82237b" providerId="LiveId" clId="{4359D718-6623-4306-904E-8960D7912D9F}" dt="2026-10-29T02:21:08.169" v="77" actId="571"/>
+          <ac:picMkLst>
+            <pc:docMk/>
+            <pc:sldMk cId="0" sldId="256"/>
+            <ac:picMk id="51" creationId="{33900560-7050-9FC1-FB8A-B32E5E99148B}"/>
+          </ac:picMkLst>
+        </pc:picChg>
+        <pc:picChg chg="add mod">
+          <ac:chgData name="Matheus Henrique de Andrade Pires." userId="4f7e66476b82237b" providerId="LiveId" clId="{4359D718-6623-4306-904E-8960D7912D9F}" dt="2026-10-29T02:21:08.169" v="77" actId="571"/>
+          <ac:picMkLst>
+            <pc:docMk/>
+            <pc:sldMk cId="0" sldId="256"/>
+            <ac:picMk id="52" creationId="{2B0ABBD8-3BA8-51F5-50B3-4B27716AA14E}"/>
           </ac:picMkLst>
         </pc:picChg>
       </pc:sldChg>
@@ -3690,7 +3890,7 @@
         </p:nvSpPr>
         <p:spPr>
           <a:xfrm>
-            <a:off x="5337125" y="4070895"/>
+            <a:off x="5337125" y="4934058"/>
             <a:ext cx="6245274" cy="733425"/>
           </a:xfrm>
           <a:prstGeom prst="roundRect">
@@ -3959,7 +4159,7 @@
         </p:blipFill>
         <p:spPr>
           <a:xfrm>
-            <a:off x="5480000" y="4213770"/>
+            <a:off x="5480000" y="5076933"/>
             <a:ext cx="342900" cy="342900"/>
           </a:xfrm>
           <a:prstGeom prst="rect">
@@ -4007,7 +4207,7 @@
         </p:blipFill>
         <p:spPr>
           <a:xfrm>
-            <a:off x="5589537" y="4313783"/>
+            <a:off x="5589537" y="5176946"/>
             <a:ext cx="123825" cy="142875"/>
           </a:xfrm>
           <a:prstGeom prst="rect">
@@ -4157,7 +4357,7 @@
               </a:lnSpc>
             </a:pPr>
             <a:r>
-              <a:rPr sz="2400" b="1" i="0" u="sng" dirty="0">
+              <a:rPr sz="2400" b="1" i="0" dirty="0">
                 <a:solidFill>
                   <a:srgbClr val="0F172A"/>
                 </a:solidFill>
@@ -4166,7 +4366,7 @@
               <a:t>1. O </a:t>
             </a:r>
             <a:r>
-              <a:rPr sz="2400" b="1" i="0" u="sng" dirty="0" err="1">
+              <a:rPr sz="2400" b="1" i="0" dirty="0" err="1">
                 <a:solidFill>
                   <a:srgbClr val="0F172A"/>
                 </a:solidFill>
@@ -4175,7 +4375,7 @@
               <a:t>Ambiente</a:t>
             </a:r>
             <a:r>
-              <a:rPr sz="2400" b="1" i="0" u="sng" dirty="0">
+              <a:rPr sz="2400" b="1" i="0" dirty="0">
                 <a:solidFill>
                   <a:srgbClr val="0F172A"/>
                 </a:solidFill>
@@ -4184,7 +4384,7 @@
               <a:t> e a </a:t>
             </a:r>
             <a:r>
-              <a:rPr sz="2400" b="1" i="0" u="sng" dirty="0" err="1">
+              <a:rPr sz="2400" b="1" i="0" dirty="0" err="1">
                 <a:solidFill>
                   <a:srgbClr val="0F172A"/>
                 </a:solidFill>
@@ -4193,7 +4393,7 @@
               <a:t>Descrição</a:t>
             </a:r>
             <a:r>
-              <a:rPr sz="2400" b="1" i="0" u="sng" dirty="0">
+              <a:rPr sz="2400" b="1" i="0" dirty="0">
                 <a:solidFill>
                   <a:srgbClr val="0F172A"/>
                 </a:solidFill>
@@ -4689,7 +4889,7 @@
         </p:nvSpPr>
         <p:spPr>
           <a:xfrm>
-            <a:off x="5956250" y="4213770"/>
+            <a:off x="5956250" y="5076933"/>
             <a:ext cx="6235749" cy="171450"/>
           </a:xfrm>
           <a:prstGeom prst="rect">
@@ -4705,14 +4905,56 @@
           <a:p>
             <a:pPr algn="l"/>
             <a:r>
-              <a:rPr sz="1050" b="1" i="0" u="none">
+              <a:rPr sz="1050" b="1" i="0" u="none" dirty="0" err="1">
                 <a:solidFill>
                   <a:srgbClr val="FFFFFF"/>
                 </a:solidFill>
                 <a:latin typeface="Plus Jakarta Sans"/>
               </a:rPr>
-              <a:t>Propriedade Markoviana Atendida</a:t>
-            </a:r>
+              <a:t>Propriedade</a:t>
+            </a:r>
+            <a:r>
+              <a:rPr sz="1050" b="1" i="0" u="none" dirty="0">
+                <a:solidFill>
+                  <a:srgbClr val="FFFFFF"/>
+                </a:solidFill>
+                <a:latin typeface="Plus Jakarta Sans"/>
+              </a:rPr>
+              <a:t> </a:t>
+            </a:r>
+            <a:r>
+              <a:rPr sz="1050" b="1" i="0" u="none" dirty="0" err="1">
+                <a:solidFill>
+                  <a:srgbClr val="FFFFFF"/>
+                </a:solidFill>
+                <a:latin typeface="Plus Jakarta Sans"/>
+              </a:rPr>
+              <a:t>Markoviana</a:t>
+            </a:r>
+            <a:r>
+              <a:rPr sz="1050" b="1" i="0" u="none" dirty="0">
+                <a:solidFill>
+                  <a:srgbClr val="FFFFFF"/>
+                </a:solidFill>
+                <a:latin typeface="Plus Jakarta Sans"/>
+              </a:rPr>
+              <a:t> </a:t>
+            </a:r>
+            <a:r>
+              <a:rPr sz="1050" b="1" i="0" u="none" dirty="0" err="1">
+                <a:solidFill>
+                  <a:srgbClr val="FFFFFF"/>
+                </a:solidFill>
+                <a:latin typeface="Plus Jakarta Sans"/>
+              </a:rPr>
+              <a:t>Atendida</a:t>
+            </a:r>
+            <a:endParaRPr sz="1050" b="1" i="0" u="none" dirty="0">
+              <a:solidFill>
+                <a:srgbClr val="FFFFFF"/>
+              </a:solidFill>
+              <a:latin typeface="Plus Jakarta Sans"/>
+            </a:endParaRPr>
           </a:p>
         </p:txBody>
       </p:sp>
@@ -4724,7 +4966,7 @@
         </p:nvSpPr>
         <p:spPr>
           <a:xfrm>
-            <a:off x="5956250" y="4404270"/>
+            <a:off x="5956250" y="5267433"/>
             <a:ext cx="5578524" cy="257175"/>
           </a:xfrm>
           <a:prstGeom prst="rect">
@@ -4748,6 +4990,261 @@
               </a:rPr>
               <a:t>P(s' | s, a) depende unicamente da situação atual do estado s e da ação a, dispensando o histórico passado de jogadas.</a:t>
             </a:r>
+          </a:p>
+        </p:txBody>
+      </p:sp>
+      <p:sp>
+        <p:nvSpPr>
+          <p:cNvPr id="56" name="Rounded Rectangle 8">
+            <a:extLst>
+              <a:ext uri="{FF2B5EF4-FFF2-40B4-BE49-F238E27FC236}">
+                <a16:creationId xmlns:a16="http://schemas.microsoft.com/office/drawing/2014/main" id="{37DC613D-DE68-48C5-92CA-EFE769CD1841}"/>
+              </a:ext>
+            </a:extLst>
+          </p:cNvPr>
+          <p:cNvSpPr/>
+          <p:nvPr/>
+        </p:nvSpPr>
+        <p:spPr>
+          <a:xfrm>
+            <a:off x="5337126" y="4067175"/>
+            <a:ext cx="6245274" cy="771525"/>
+          </a:xfrm>
+          <a:prstGeom prst="roundRect">
+            <a:avLst>
+              <a:gd name="adj" fmla="val 19753"/>
+            </a:avLst>
+          </a:prstGeom>
+          <a:solidFill>
+            <a:srgbClr val="FFFFFF"/>
+          </a:solidFill>
+          <a:ln w="9525">
+            <a:solidFill>
+              <a:srgbClr val="E2E8F0"/>
+            </a:solidFill>
+          </a:ln>
+          <a:effectLst/>
+        </p:spPr>
+        <p:style>
+          <a:lnRef idx="1">
+            <a:schemeClr val="accent1"/>
+          </a:lnRef>
+          <a:fillRef idx="3">
+            <a:schemeClr val="accent1"/>
+          </a:fillRef>
+          <a:effectRef idx="2">
+            <a:schemeClr val="accent1"/>
+          </a:effectRef>
+          <a:fontRef idx="minor">
+            <a:schemeClr val="lt1"/>
+          </a:fontRef>
+        </p:style>
+        <p:txBody>
+          <a:bodyPr rtlCol="0" anchor="ctr"/>
+          <a:lstStyle/>
+          <a:p>
+            <a:pPr algn="ctr"/>
+            <a:endParaRPr/>
+          </a:p>
+        </p:txBody>
+      </p:sp>
+      <p:sp>
+        <p:nvSpPr>
+          <p:cNvPr id="57" name="Rounded Rectangle 13">
+            <a:extLst>
+              <a:ext uri="{FF2B5EF4-FFF2-40B4-BE49-F238E27FC236}">
+                <a16:creationId xmlns:a16="http://schemas.microsoft.com/office/drawing/2014/main" id="{303C5C41-DC53-FFBC-A1F8-0B5F9F54D5F2}"/>
+              </a:ext>
+            </a:extLst>
+          </p:cNvPr>
+          <p:cNvSpPr/>
+          <p:nvPr/>
+        </p:nvSpPr>
+        <p:spPr>
+          <a:xfrm>
+            <a:off x="5480001" y="4210050"/>
+            <a:ext cx="342900" cy="342900"/>
+          </a:xfrm>
+          <a:prstGeom prst="roundRect">
+            <a:avLst>
+              <a:gd name="adj" fmla="val 22222"/>
+            </a:avLst>
+          </a:prstGeom>
+          <a:solidFill>
+            <a:schemeClr val="accent5">
+              <a:lumMod val="60000"/>
+              <a:lumOff val="40000"/>
+            </a:schemeClr>
+          </a:solidFill>
+          <a:ln>
+            <a:noFill/>
+          </a:ln>
+          <a:effectLst/>
+        </p:spPr>
+        <p:style>
+          <a:lnRef idx="1">
+            <a:schemeClr val="accent1"/>
+          </a:lnRef>
+          <a:fillRef idx="3">
+            <a:schemeClr val="accent1"/>
+          </a:fillRef>
+          <a:effectRef idx="2">
+            <a:schemeClr val="accent1"/>
+          </a:effectRef>
+          <a:fontRef idx="minor">
+            <a:schemeClr val="lt1"/>
+          </a:fontRef>
+        </p:style>
+        <p:txBody>
+          <a:bodyPr rtlCol="0" anchor="ctr"/>
+          <a:lstStyle/>
+          <a:p>
+            <a:pPr algn="ctr"/>
+            <a:endParaRPr>
+              <a:solidFill>
+                <a:schemeClr val="accent2">
+                  <a:lumMod val="60000"/>
+                  <a:lumOff val="40000"/>
+                </a:schemeClr>
+              </a:solidFill>
+            </a:endParaRPr>
+          </a:p>
+        </p:txBody>
+      </p:sp>
+      <p:sp>
+        <p:nvSpPr>
+          <p:cNvPr id="58" name="TextBox 28">
+            <a:extLst>
+              <a:ext uri="{FF2B5EF4-FFF2-40B4-BE49-F238E27FC236}">
+                <a16:creationId xmlns:a16="http://schemas.microsoft.com/office/drawing/2014/main" id="{29137423-E009-9A96-4712-9AF60903CFDA}"/>
+              </a:ext>
+            </a:extLst>
+          </p:cNvPr>
+          <p:cNvSpPr txBox="1"/>
+          <p:nvPr/>
+        </p:nvSpPr>
+        <p:spPr>
+          <a:xfrm>
+            <a:off x="5337126" y="4294938"/>
+            <a:ext cx="628650" cy="173124"/>
+          </a:xfrm>
+          <a:prstGeom prst="rect">
+            <a:avLst/>
+          </a:prstGeom>
+          <a:noFill/>
+        </p:spPr>
+        <p:txBody>
+          <a:bodyPr wrap="square" lIns="0" tIns="0" rIns="0" bIns="0" anchor="ctr">
+            <a:spAutoFit/>
+          </a:bodyPr>
+          <a:lstStyle/>
+          <a:p>
+            <a:pPr algn="ctr"/>
+            <a:r>
+              <a:rPr sz="1125" b="1" i="0" u="none" dirty="0">
+                <a:solidFill>
+                  <a:schemeClr val="accent5">
+                    <a:lumMod val="50000"/>
+                  </a:schemeClr>
+                </a:solidFill>
+                <a:latin typeface="Plus Jakarta Sans"/>
+              </a:rPr>
+              <a:t>03</a:t>
+            </a:r>
+          </a:p>
+        </p:txBody>
+      </p:sp>
+      <p:sp>
+        <p:nvSpPr>
+          <p:cNvPr id="59" name="TextBox 33">
+            <a:extLst>
+              <a:ext uri="{FF2B5EF4-FFF2-40B4-BE49-F238E27FC236}">
+                <a16:creationId xmlns:a16="http://schemas.microsoft.com/office/drawing/2014/main" id="{67F1167C-7FF6-CF24-E73B-B39C4CB5B497}"/>
+              </a:ext>
+            </a:extLst>
+          </p:cNvPr>
+          <p:cNvSpPr txBox="1"/>
+          <p:nvPr/>
+        </p:nvSpPr>
+        <p:spPr>
+          <a:xfrm>
+            <a:off x="5956251" y="4210050"/>
+            <a:ext cx="1319272" cy="173124"/>
+          </a:xfrm>
+          <a:prstGeom prst="rect">
+            <a:avLst/>
+          </a:prstGeom>
+          <a:noFill/>
+        </p:spPr>
+        <p:txBody>
+          <a:bodyPr wrap="none" lIns="0" tIns="0" rIns="0" bIns="0" anchor="t">
+            <a:spAutoFit/>
+          </a:bodyPr>
+          <a:lstStyle/>
+          <a:p>
+            <a:pPr algn="l"/>
+            <a:r>
+              <a:rPr lang="pt-BR" sz="1125" b="1" i="0" u="none" dirty="0">
+                <a:solidFill>
+                  <a:srgbClr val="0F172A"/>
+                </a:solidFill>
+                <a:latin typeface="Plus Jakarta Sans"/>
+              </a:rPr>
+              <a:t>Obstáculos relevantes</a:t>
+            </a:r>
+            <a:endParaRPr sz="1125" b="1" i="0" u="none" dirty="0">
+              <a:solidFill>
+                <a:srgbClr val="0F172A"/>
+              </a:solidFill>
+              <a:latin typeface="Plus Jakarta Sans"/>
+            </a:endParaRPr>
+          </a:p>
+        </p:txBody>
+      </p:sp>
+      <p:sp>
+        <p:nvSpPr>
+          <p:cNvPr id="60" name="TextBox 34">
+            <a:extLst>
+              <a:ext uri="{FF2B5EF4-FFF2-40B4-BE49-F238E27FC236}">
+                <a16:creationId xmlns:a16="http://schemas.microsoft.com/office/drawing/2014/main" id="{CC4AB9BA-6CAE-AD57-B1D8-7880A17F3264}"/>
+              </a:ext>
+            </a:extLst>
+          </p:cNvPr>
+          <p:cNvSpPr txBox="1"/>
+          <p:nvPr/>
+        </p:nvSpPr>
+        <p:spPr>
+          <a:xfrm>
+            <a:off x="5956251" y="4410075"/>
+            <a:ext cx="5578524" cy="138499"/>
+          </a:xfrm>
+          <a:prstGeom prst="rect">
+            <a:avLst/>
+          </a:prstGeom>
+          <a:noFill/>
+        </p:spPr>
+        <p:txBody>
+          <a:bodyPr wrap="square" lIns="0" tIns="0" rIns="0" bIns="0" anchor="t">
+            <a:spAutoFit/>
+          </a:bodyPr>
+          <a:lstStyle/>
+          <a:p>
+            <a:pPr algn="l"/>
+            <a:r>
+              <a:rPr lang="pt-BR" sz="900" dirty="0">
+                <a:solidFill>
+                  <a:srgbClr val="475569"/>
+                </a:solidFill>
+                <a:latin typeface="Plus Jakarta Sans"/>
+              </a:rPr>
+              <a:t>As paredes e o próprio corpo da cobra</a:t>
+            </a:r>
+            <a:endParaRPr sz="900" b="0" i="0" u="none" dirty="0">
+              <a:solidFill>
+                <a:srgbClr val="475569"/>
+              </a:solidFill>
+              <a:latin typeface="Plus Jakarta Sans"/>
+            </a:endParaRPr>
           </a:p>
         </p:txBody>
       </p:sp>

--- a/docs/snake-game-apresentacao.pptx
+++ b/docs/snake-game-apresentacao.pptx
@@ -138,7 +138,7 @@
 <file path=ppt/revisionInfo.xml><?xml version="1.0" encoding="utf-8"?>
 <p1510:revInfo xmlns:a="http://schemas.openxmlformats.org/drawingml/2006/main" xmlns:r="http://schemas.openxmlformats.org/officeDocument/2006/relationships" xmlns:p1510="http://schemas.microsoft.com/office/powerpoint/2015/10/main">
   <p1510:revLst>
-    <p1510:client id="{CC69E834-DAD2-45A8-9EBF-D7E658F449FC}" v="11" dt="2026-10-29T02:25:13.110"/>
+    <p1510:client id="{CC69E834-DAD2-45A8-9EBF-D7E658F449FC}" v="15" dt="2026-10-29T12:45:34.459"/>
   </p1510:revLst>
 </p1510:revInfo>
 </file>
@@ -148,12 +148,12 @@
   <pc:docChgLst>
     <pc:chgData name="Matheus Henrique de Andrade Pires." userId="4f7e66476b82237b" providerId="LiveId" clId="{4359D718-6623-4306-904E-8960D7912D9F}"/>
     <pc:docChg chg="undo custSel delSld modSld">
-      <pc:chgData name="Matheus Henrique de Andrade Pires." userId="4f7e66476b82237b" providerId="LiveId" clId="{4359D718-6623-4306-904E-8960D7912D9F}" dt="2026-10-29T02:25:51.217" v="282" actId="20577"/>
+      <pc:chgData name="Matheus Henrique de Andrade Pires." userId="4f7e66476b82237b" providerId="LiveId" clId="{4359D718-6623-4306-904E-8960D7912D9F}" dt="2026-10-29T12:45:35.752" v="322" actId="21"/>
       <pc:docMkLst>
         <pc:docMk/>
       </pc:docMkLst>
       <pc:sldChg chg="addSp delSp modSp mod">
-        <pc:chgData name="Matheus Henrique de Andrade Pires." userId="4f7e66476b82237b" providerId="LiveId" clId="{4359D718-6623-4306-904E-8960D7912D9F}" dt="2026-10-29T02:25:51.217" v="282" actId="20577"/>
+        <pc:chgData name="Matheus Henrique de Andrade Pires." userId="4f7e66476b82237b" providerId="LiveId" clId="{4359D718-6623-4306-904E-8960D7912D9F}" dt="2026-10-29T12:45:35.752" v="322" actId="21"/>
         <pc:sldMkLst>
           <pc:docMk/>
           <pc:sldMk cId="0" sldId="256"/>
@@ -180,6 +180,14 @@
             <pc:docMk/>
             <pc:sldMk cId="0" sldId="256"/>
             <ac:spMk id="22" creationId="{00000000-0000-0000-0000-000000000000}"/>
+          </ac:spMkLst>
+        </pc:spChg>
+        <pc:spChg chg="mod">
+          <ac:chgData name="Matheus Henrique de Andrade Pires." userId="4f7e66476b82237b" providerId="LiveId" clId="{4359D718-6623-4306-904E-8960D7912D9F}" dt="2026-10-29T12:45:34.459" v="321"/>
+          <ac:spMkLst>
+            <pc:docMk/>
+            <pc:sldMk cId="0" sldId="256"/>
+            <ac:spMk id="34" creationId="{00000000-0000-0000-0000-000000000000}"/>
           </ac:spMkLst>
         </pc:spChg>
         <pc:spChg chg="mod">
@@ -311,7 +319,7 @@
           </ac:spMkLst>
         </pc:spChg>
         <pc:spChg chg="add mod">
-          <ac:chgData name="Matheus Henrique de Andrade Pires." userId="4f7e66476b82237b" providerId="LiveId" clId="{4359D718-6623-4306-904E-8960D7912D9F}" dt="2026-10-29T02:23:30.529" v="90" actId="207"/>
+          <ac:chgData name="Matheus Henrique de Andrade Pires." userId="4f7e66476b82237b" providerId="LiveId" clId="{4359D718-6623-4306-904E-8960D7912D9F}" dt="2026-10-29T12:44:32.064" v="284" actId="20577"/>
           <ac:spMkLst>
             <pc:docMk/>
             <pc:sldMk cId="0" sldId="256"/>
@@ -319,7 +327,7 @@
           </ac:spMkLst>
         </pc:spChg>
         <pc:spChg chg="add mod">
-          <ac:chgData name="Matheus Henrique de Andrade Pires." userId="4f7e66476b82237b" providerId="LiveId" clId="{4359D718-6623-4306-904E-8960D7912D9F}" dt="2026-10-29T02:25:29.417" v="130" actId="20577"/>
+          <ac:chgData name="Matheus Henrique de Andrade Pires." userId="4f7e66476b82237b" providerId="LiveId" clId="{4359D718-6623-4306-904E-8960D7912D9F}" dt="2026-10-29T12:45:35.752" v="322" actId="21"/>
           <ac:spMkLst>
             <pc:docMk/>
             <pc:sldMk cId="0" sldId="256"/>
@@ -332,6 +340,22 @@
             <pc:docMk/>
             <pc:sldMk cId="0" sldId="256"/>
             <ac:spMk id="60" creationId="{CC4AB9BA-6CAE-AD57-B1D8-7880A17F3264}"/>
+          </ac:spMkLst>
+        </pc:spChg>
+        <pc:spChg chg="add del mod">
+          <ac:chgData name="Matheus Henrique de Andrade Pires." userId="4f7e66476b82237b" providerId="LiveId" clId="{4359D718-6623-4306-904E-8960D7912D9F}" dt="2026-10-29T12:45:32.831" v="319" actId="22"/>
+          <ac:spMkLst>
+            <pc:docMk/>
+            <pc:sldMk cId="0" sldId="256"/>
+            <ac:spMk id="62" creationId="{0F6FEACF-7C2D-6B1C-CEE5-B9A324ADDCC1}"/>
+          </ac:spMkLst>
+        </pc:spChg>
+        <pc:spChg chg="add del">
+          <ac:chgData name="Matheus Henrique de Andrade Pires." userId="4f7e66476b82237b" providerId="LiveId" clId="{4359D718-6623-4306-904E-8960D7912D9F}" dt="2026-10-29T12:45:21.425" v="302" actId="22"/>
+          <ac:spMkLst>
+            <pc:docMk/>
+            <pc:sldMk cId="0" sldId="256"/>
+            <ac:spMk id="64" creationId="{83120A8C-8C3B-BB9F-059D-6D7A16794466}"/>
           </ac:spMkLst>
         </pc:spChg>
         <pc:picChg chg="mod">
@@ -4660,7 +4684,7 @@
           <a:p>
             <a:pPr algn="ctr"/>
             <a:r>
-              <a:rPr sz="1125" b="1" i="0" u="none">
+              <a:rPr sz="1125" b="1" i="0" u="none" dirty="0">
                 <a:solidFill>
                   <a:srgbClr val="854D0E"/>
                 </a:solidFill>
@@ -4835,7 +4859,7 @@
           <a:p>
             <a:pPr algn="l"/>
             <a:r>
-              <a:rPr sz="1125" b="1" i="0" u="none">
+              <a:rPr sz="1125" b="1" i="0" u="none" dirty="0">
                 <a:solidFill>
                   <a:srgbClr val="0F172A"/>
                 </a:solidFill>
@@ -5044,7 +5068,7 @@
           <a:lstStyle/>
           <a:p>
             <a:pPr algn="ctr"/>
-            <a:endParaRPr/>
+            <a:endParaRPr dirty="0"/>
           </a:p>
         </p:txBody>
       </p:sp>
@@ -5149,8 +5173,27 @@
                 </a:solidFill>
                 <a:latin typeface="Plus Jakarta Sans"/>
               </a:rPr>
-              <a:t>03</a:t>
-            </a:r>
+              <a:t>0</a:t>
+            </a:r>
+            <a:r>
+              <a:rPr lang="en-US" sz="1125" b="1" i="0" u="none" dirty="0">
+                <a:solidFill>
+                  <a:schemeClr val="accent5">
+                    <a:lumMod val="50000"/>
+                  </a:schemeClr>
+                </a:solidFill>
+                <a:latin typeface="Plus Jakarta Sans"/>
+              </a:rPr>
+              <a:t>4</a:t>
+            </a:r>
+            <a:endParaRPr sz="1125" b="1" i="0" u="none" dirty="0">
+              <a:solidFill>
+                <a:schemeClr val="accent5">
+                  <a:lumMod val="50000"/>
+                </a:schemeClr>
+              </a:solidFill>
+              <a:latin typeface="Plus Jakarta Sans"/>
+            </a:endParaRPr>
           </a:p>
         </p:txBody>
       </p:sp>
@@ -5192,12 +5235,6 @@
               </a:rPr>
               <a:t>Obstáculos relevantes</a:t>
             </a:r>
-            <a:endParaRPr sz="1125" b="1" i="0" u="none" dirty="0">
-              <a:solidFill>
-                <a:srgbClr val="0F172A"/>
-              </a:solidFill>
-              <a:latin typeface="Plus Jakarta Sans"/>
-            </a:endParaRPr>
           </a:p>
         </p:txBody>
       </p:sp>
